--- a/figures/device_stack_electrode_front.pptx
+++ b/figures/device_stack_electrode_front.pptx
@@ -3090,7 +3090,141 @@
       <p:grpSpPr/>
       <p:sp>
         <p:nvSpPr>
-          <p:cNvPr id="2" name="Bottom-emitting OLED / Glass (n = 1.77) front"/>
+          <p:cNvPr id="2" name="Bottom-emitting OLED / Glass (n = 1.77) left"/>
+          <p:cNvSpPr/>
+          <p:nvPr/>
+        </p:nvSpPr>
+        <p:spPr>
+          <a:xfrm>
+            <a:off x="3992780" y="3781689"/>
+            <a:ext cx="274313" cy="574751"/>
+          </a:xfrm>
+          <a:custGeom>
+            <a:avLst/>
+            <a:gdLst/>
+            <a:ahLst/>
+            <a:cxnLst/>
+            <a:rect l="l" t="t" r="r" b="b"/>
+            <a:pathLst>
+              <a:path w="274313" h="574751">
+                <a:moveTo>
+                  <a:pt x="274313" y="574751"/>
+                </a:moveTo>
+                <a:lnTo>
+                  <a:pt x="0" y="400584"/>
+                </a:lnTo>
+                <a:lnTo>
+                  <a:pt x="0" y="0"/>
+                </a:lnTo>
+                <a:lnTo>
+                  <a:pt x="274313" y="174167"/>
+                </a:lnTo>
+                <a:close/>
+              </a:path>
+            </a:pathLst>
+          </a:custGeom>
+          <a:solidFill>
+            <a:srgbClr val="AEC0CE"/>
+          </a:solidFill>
+          <a:ln w="9525">
+            <a:solidFill>
+              <a:srgbClr val="5D666F"/>
+            </a:solidFill>
+          </a:ln>
+          <a:effectLst/>
+        </p:spPr>
+        <p:style>
+          <a:lnRef idx="1">
+            <a:schemeClr val="accent1"/>
+          </a:lnRef>
+          <a:fillRef idx="3">
+            <a:schemeClr val="accent1"/>
+          </a:fillRef>
+          <a:effectRef idx="2">
+            <a:schemeClr val="accent1"/>
+          </a:effectRef>
+          <a:fontRef idx="minor">
+            <a:schemeClr val="lt1"/>
+          </a:fontRef>
+        </p:style>
+        <p:txBody>
+          <a:bodyPr rtlCol="0" anchor="ctr"/>
+          <a:lstStyle/>
+          <a:p>
+            <a:pPr algn="ctr"/>
+          </a:p>
+        </p:txBody>
+      </p:sp>
+      <p:sp>
+        <p:nvSpPr>
+          <p:cNvPr id="3" name="Bottom-emitting OLED / Glass (n = 1.77) right"/>
+          <p:cNvSpPr/>
+          <p:nvPr/>
+        </p:nvSpPr>
+        <p:spPr>
+          <a:xfrm>
+            <a:off x="7924602" y="3781689"/>
+            <a:ext cx="274313" cy="574751"/>
+          </a:xfrm>
+          <a:custGeom>
+            <a:avLst/>
+            <a:gdLst/>
+            <a:ahLst/>
+            <a:cxnLst/>
+            <a:rect l="l" t="t" r="r" b="b"/>
+            <a:pathLst>
+              <a:path w="274313" h="574751">
+                <a:moveTo>
+                  <a:pt x="0" y="574751"/>
+                </a:moveTo>
+                <a:lnTo>
+                  <a:pt x="274313" y="400584"/>
+                </a:lnTo>
+                <a:lnTo>
+                  <a:pt x="274313" y="0"/>
+                </a:lnTo>
+                <a:lnTo>
+                  <a:pt x="0" y="174167"/>
+                </a:lnTo>
+                <a:close/>
+              </a:path>
+            </a:pathLst>
+          </a:custGeom>
+          <a:solidFill>
+            <a:srgbClr val="AEC0CE"/>
+          </a:solidFill>
+          <a:ln w="9525">
+            <a:solidFill>
+              <a:srgbClr val="5D666F"/>
+            </a:solidFill>
+          </a:ln>
+          <a:effectLst/>
+        </p:spPr>
+        <p:style>
+          <a:lnRef idx="1">
+            <a:schemeClr val="accent1"/>
+          </a:lnRef>
+          <a:fillRef idx="3">
+            <a:schemeClr val="accent1"/>
+          </a:fillRef>
+          <a:effectRef idx="2">
+            <a:schemeClr val="accent1"/>
+          </a:effectRef>
+          <a:fontRef idx="minor">
+            <a:schemeClr val="lt1"/>
+          </a:fontRef>
+        </p:style>
+        <p:txBody>
+          <a:bodyPr rtlCol="0" anchor="ctr"/>
+          <a:lstStyle/>
+          <a:p>
+            <a:pPr algn="ctr"/>
+          </a:p>
+        </p:txBody>
+      </p:sp>
+      <p:sp>
+        <p:nvSpPr>
+          <p:cNvPr id="4" name="Bottom-emitting OLED / Glass (n = 1.77) front"/>
           <p:cNvSpPr/>
           <p:nvPr/>
         </p:nvSpPr>
@@ -3157,14 +3291,49 @@
       </p:sp>
       <p:sp>
         <p:nvSpPr>
-          <p:cNvPr id="3" name="Bottom-emitting OLED / Glass (n = 1.77) side"/>
+          <p:cNvPr id="5" name="Bottom-emitting OLED / Glass (n = 1.77) label"/>
+          <p:cNvSpPr txBox="1"/>
+          <p:nvPr/>
+        </p:nvSpPr>
+        <p:spPr>
+          <a:xfrm>
+            <a:off x="4336760" y="3991996"/>
+            <a:ext cx="3518175" cy="328305"/>
+          </a:xfrm>
+          <a:prstGeom prst="rect">
+            <a:avLst/>
+          </a:prstGeom>
+          <a:noFill/>
+        </p:spPr>
+        <p:txBody>
+          <a:bodyPr wrap="square" anchor="ctr" lIns="0" rIns="0" tIns="0" bIns="0">
+            <a:noAutofit/>
+          </a:bodyPr>
+          <a:lstStyle/>
+          <a:p>
+            <a:pPr algn="ctr"/>
+            <a:r>
+              <a:rPr sz="994" b="0">
+                <a:solidFill>
+                  <a:srgbClr val="1B2026"/>
+                </a:solidFill>
+                <a:latin typeface="Arial"/>
+              </a:rPr>
+              <a:t>Glass (n = 1.77)</a:t>
+            </a:r>
+          </a:p>
+        </p:txBody>
+      </p:sp>
+      <p:sp>
+        <p:nvSpPr>
+          <p:cNvPr id="6" name="Bottom-emitting OLED / Transparent electrode left"/>
           <p:cNvSpPr/>
           <p:nvPr/>
         </p:nvSpPr>
         <p:spPr>
           <a:xfrm>
-            <a:off x="7924602" y="3781689"/>
-            <a:ext cx="278667" cy="574751"/>
+            <a:off x="3992780" y="3346271"/>
+            <a:ext cx="274313" cy="609585"/>
           </a:xfrm>
           <a:custGeom>
             <a:avLst/>
@@ -3173,25 +3342,25 @@
             <a:cxnLst/>
             <a:rect l="l" t="t" r="r" b="b"/>
             <a:pathLst>
-              <a:path w="278667" h="574751">
+              <a:path w="274313" h="609585">
                 <a:moveTo>
-                  <a:pt x="0" y="574751"/>
+                  <a:pt x="274313" y="609585"/>
                 </a:moveTo>
                 <a:lnTo>
-                  <a:pt x="278667" y="400584"/>
-                </a:lnTo>
-                <a:lnTo>
-                  <a:pt x="278667" y="0"/>
-                </a:lnTo>
-                <a:lnTo>
-                  <a:pt x="0" y="174167"/>
+                  <a:pt x="0" y="435418"/>
+                </a:lnTo>
+                <a:lnTo>
+                  <a:pt x="0" y="0"/>
+                </a:lnTo>
+                <a:lnTo>
+                  <a:pt x="274313" y="174167"/>
                 </a:lnTo>
                 <a:close/>
               </a:path>
             </a:pathLst>
           </a:custGeom>
           <a:solidFill>
-            <a:srgbClr val="A1B2BF"/>
+            <a:srgbClr val="6BB1C3"/>
           </a:solidFill>
           <a:ln w="9525">
             <a:solidFill>
@@ -3224,42 +3393,74 @@
       </p:sp>
       <p:sp>
         <p:nvSpPr>
-          <p:cNvPr id="4" name="Bottom-emitting OLED / Glass (n = 1.77) label"/>
-          <p:cNvSpPr txBox="1"/>
+          <p:cNvPr id="7" name="Bottom-emitting OLED / Transparent electrode right"/>
+          <p:cNvSpPr/>
           <p:nvPr/>
         </p:nvSpPr>
         <p:spPr>
           <a:xfrm>
-            <a:off x="4336760" y="3991996"/>
-            <a:ext cx="3518175" cy="328305"/>
-          </a:xfrm>
-          <a:prstGeom prst="rect">
+            <a:off x="7924602" y="3346271"/>
+            <a:ext cx="274313" cy="609585"/>
+          </a:xfrm>
+          <a:custGeom>
             <a:avLst/>
-          </a:prstGeom>
-          <a:noFill/>
-        </p:spPr>
-        <p:txBody>
-          <a:bodyPr wrap="square" anchor="ctr" lIns="0" rIns="0" tIns="0" bIns="0">
-            <a:noAutofit/>
-          </a:bodyPr>
+            <a:gdLst/>
+            <a:ahLst/>
+            <a:cxnLst/>
+            <a:rect l="l" t="t" r="r" b="b"/>
+            <a:pathLst>
+              <a:path w="274313" h="609585">
+                <a:moveTo>
+                  <a:pt x="0" y="609585"/>
+                </a:moveTo>
+                <a:lnTo>
+                  <a:pt x="274313" y="435418"/>
+                </a:lnTo>
+                <a:lnTo>
+                  <a:pt x="274313" y="0"/>
+                </a:lnTo>
+                <a:lnTo>
+                  <a:pt x="0" y="174167"/>
+                </a:lnTo>
+                <a:close/>
+              </a:path>
+            </a:pathLst>
+          </a:custGeom>
+          <a:solidFill>
+            <a:srgbClr val="6BB1C3"/>
+          </a:solidFill>
+          <a:ln w="9525">
+            <a:solidFill>
+              <a:srgbClr val="5D666F"/>
+            </a:solidFill>
+          </a:ln>
+          <a:effectLst/>
+        </p:spPr>
+        <p:style>
+          <a:lnRef idx="1">
+            <a:schemeClr val="accent1"/>
+          </a:lnRef>
+          <a:fillRef idx="3">
+            <a:schemeClr val="accent1"/>
+          </a:fillRef>
+          <a:effectRef idx="2">
+            <a:schemeClr val="accent1"/>
+          </a:effectRef>
+          <a:fontRef idx="minor">
+            <a:schemeClr val="lt1"/>
+          </a:fontRef>
+        </p:style>
+        <p:txBody>
+          <a:bodyPr rtlCol="0" anchor="ctr"/>
           <a:lstStyle/>
           <a:p>
             <a:pPr algn="ctr"/>
-            <a:r>
-              <a:rPr sz="994" b="0">
-                <a:solidFill>
-                  <a:srgbClr val="1B2026"/>
-                </a:solidFill>
-                <a:latin typeface="Arial"/>
-              </a:rPr>
-              <a:t>Glass (n = 1.77)</a:t>
-            </a:r>
-          </a:p>
-        </p:txBody>
-      </p:sp>
-      <p:sp>
-        <p:nvSpPr>
-          <p:cNvPr id="5" name="Bottom-emitting OLED / Transparent electrode front"/>
+          </a:p>
+        </p:txBody>
+      </p:sp>
+      <p:sp>
+        <p:nvSpPr>
+          <p:cNvPr id="8" name="Bottom-emitting OLED / Transparent electrode front"/>
           <p:cNvSpPr/>
           <p:nvPr/>
         </p:nvSpPr>
@@ -3326,14 +3527,84 @@
       </p:sp>
       <p:sp>
         <p:nvSpPr>
-          <p:cNvPr id="6" name="Bottom-emitting OLED / Transparent electrode side"/>
+          <p:cNvPr id="9" name="Bottom-emitting OLED / Transparent electrode label"/>
+          <p:cNvSpPr txBox="1"/>
+          <p:nvPr/>
+        </p:nvSpPr>
+        <p:spPr>
+          <a:xfrm>
+            <a:off x="4336760" y="3478203"/>
+            <a:ext cx="3518175" cy="328305"/>
+          </a:xfrm>
+          <a:prstGeom prst="rect">
+            <a:avLst/>
+          </a:prstGeom>
+          <a:noFill/>
+        </p:spPr>
+        <p:txBody>
+          <a:bodyPr wrap="square" anchor="ctr" lIns="0" rIns="0" tIns="0" bIns="0">
+            <a:noAutofit/>
+          </a:bodyPr>
+          <a:lstStyle/>
+          <a:p>
+            <a:pPr algn="ctr"/>
+            <a:r>
+              <a:rPr sz="994" b="0">
+                <a:solidFill>
+                  <a:srgbClr val="1B2026"/>
+                </a:solidFill>
+                <a:latin typeface="Arial"/>
+              </a:rPr>
+              <a:t>Transparent electrode</a:t>
+            </a:r>
+          </a:p>
+        </p:txBody>
+      </p:sp>
+      <p:sp>
+        <p:nvSpPr>
+          <p:cNvPr id="10" name="Bottom-emitting OLED / Transparent electrode label note"/>
+          <p:cNvSpPr txBox="1"/>
+          <p:nvPr/>
+        </p:nvSpPr>
+        <p:spPr>
+          <a:xfrm>
+            <a:off x="4336760" y="3703749"/>
+            <a:ext cx="3518175" cy="260380"/>
+          </a:xfrm>
+          <a:prstGeom prst="rect">
+            <a:avLst/>
+          </a:prstGeom>
+          <a:noFill/>
+        </p:spPr>
+        <p:txBody>
+          <a:bodyPr wrap="square" anchor="ctr" lIns="0" rIns="0" tIns="0" bIns="0">
+            <a:noAutofit/>
+          </a:bodyPr>
+          <a:lstStyle/>
+          <a:p>
+            <a:pPr algn="ctr"/>
+            <a:r>
+              <a:rPr sz="788" b="0">
+                <a:solidFill>
+                  <a:srgbClr val="D62828"/>
+                </a:solidFill>
+                <a:latin typeface="Arial"/>
+              </a:rPr>
+              <a:t>ITO 50 nm   or   Ag 10 nm</a:t>
+            </a:r>
+          </a:p>
+        </p:txBody>
+      </p:sp>
+      <p:sp>
+        <p:nvSpPr>
+          <p:cNvPr id="11" name="Bottom-emitting OLED / HTL (200 nm) left"/>
           <p:cNvSpPr/>
           <p:nvPr/>
         </p:nvSpPr>
         <p:spPr>
           <a:xfrm>
-            <a:off x="7924602" y="3346271"/>
-            <a:ext cx="278667" cy="609585"/>
+            <a:off x="3992780" y="2997937"/>
+            <a:ext cx="274313" cy="522501"/>
           </a:xfrm>
           <a:custGeom>
             <a:avLst/>
@@ -3342,25 +3613,25 @@
             <a:cxnLst/>
             <a:rect l="l" t="t" r="r" b="b"/>
             <a:pathLst>
-              <a:path w="278667" h="609585">
+              <a:path w="274313" h="522501">
                 <a:moveTo>
-                  <a:pt x="0" y="609585"/>
+                  <a:pt x="274313" y="522501"/>
                 </a:moveTo>
                 <a:lnTo>
-                  <a:pt x="278667" y="435418"/>
-                </a:lnTo>
-                <a:lnTo>
-                  <a:pt x="278667" y="0"/>
-                </a:lnTo>
-                <a:lnTo>
-                  <a:pt x="0" y="174167"/>
+                  <a:pt x="0" y="348334"/>
+                </a:lnTo>
+                <a:lnTo>
+                  <a:pt x="0" y="0"/>
+                </a:lnTo>
+                <a:lnTo>
+                  <a:pt x="274313" y="174167"/>
                 </a:lnTo>
                 <a:close/>
               </a:path>
             </a:pathLst>
           </a:custGeom>
           <a:solidFill>
-            <a:srgbClr val="63A5B5"/>
+            <a:srgbClr val="CA9B51"/>
           </a:solidFill>
           <a:ln w="9525">
             <a:solidFill>
@@ -3393,77 +3664,74 @@
       </p:sp>
       <p:sp>
         <p:nvSpPr>
-          <p:cNvPr id="7" name="Bottom-emitting OLED / Transparent electrode label"/>
-          <p:cNvSpPr txBox="1"/>
+          <p:cNvPr id="12" name="Bottom-emitting OLED / HTL (200 nm) right"/>
+          <p:cNvSpPr/>
           <p:nvPr/>
         </p:nvSpPr>
         <p:spPr>
           <a:xfrm>
-            <a:off x="4336760" y="3478203"/>
-            <a:ext cx="3518175" cy="328305"/>
-          </a:xfrm>
-          <a:prstGeom prst="rect">
+            <a:off x="7924602" y="2997937"/>
+            <a:ext cx="274313" cy="522501"/>
+          </a:xfrm>
+          <a:custGeom>
             <a:avLst/>
-          </a:prstGeom>
-          <a:noFill/>
-        </p:spPr>
-        <p:txBody>
-          <a:bodyPr wrap="square" anchor="ctr" lIns="0" rIns="0" tIns="0" bIns="0">
-            <a:noAutofit/>
-          </a:bodyPr>
+            <a:gdLst/>
+            <a:ahLst/>
+            <a:cxnLst/>
+            <a:rect l="l" t="t" r="r" b="b"/>
+            <a:pathLst>
+              <a:path w="274313" h="522501">
+                <a:moveTo>
+                  <a:pt x="0" y="522501"/>
+                </a:moveTo>
+                <a:lnTo>
+                  <a:pt x="274313" y="348334"/>
+                </a:lnTo>
+                <a:lnTo>
+                  <a:pt x="274313" y="0"/>
+                </a:lnTo>
+                <a:lnTo>
+                  <a:pt x="0" y="174167"/>
+                </a:lnTo>
+                <a:close/>
+              </a:path>
+            </a:pathLst>
+          </a:custGeom>
+          <a:solidFill>
+            <a:srgbClr val="CA9B51"/>
+          </a:solidFill>
+          <a:ln w="9525">
+            <a:solidFill>
+              <a:srgbClr val="5D666F"/>
+            </a:solidFill>
+          </a:ln>
+          <a:effectLst/>
+        </p:spPr>
+        <p:style>
+          <a:lnRef idx="1">
+            <a:schemeClr val="accent1"/>
+          </a:lnRef>
+          <a:fillRef idx="3">
+            <a:schemeClr val="accent1"/>
+          </a:fillRef>
+          <a:effectRef idx="2">
+            <a:schemeClr val="accent1"/>
+          </a:effectRef>
+          <a:fontRef idx="minor">
+            <a:schemeClr val="lt1"/>
+          </a:fontRef>
+        </p:style>
+        <p:txBody>
+          <a:bodyPr rtlCol="0" anchor="ctr"/>
           <a:lstStyle/>
           <a:p>
             <a:pPr algn="ctr"/>
-            <a:r>
-              <a:rPr sz="994" b="0">
-                <a:solidFill>
-                  <a:srgbClr val="1B2026"/>
-                </a:solidFill>
-                <a:latin typeface="Arial"/>
-              </a:rPr>
-              <a:t>Transparent electrode</a:t>
-            </a:r>
-          </a:p>
-        </p:txBody>
-      </p:sp>
-      <p:sp>
-        <p:nvSpPr>
-          <p:cNvPr id="8" name="Bottom-emitting OLED / Transparent electrode label note"/>
-          <p:cNvSpPr txBox="1"/>
-          <p:nvPr/>
-        </p:nvSpPr>
-        <p:spPr>
-          <a:xfrm>
-            <a:off x="4336760" y="3703749"/>
-            <a:ext cx="3518175" cy="260380"/>
-          </a:xfrm>
-          <a:prstGeom prst="rect">
-            <a:avLst/>
-          </a:prstGeom>
-          <a:noFill/>
-        </p:spPr>
-        <p:txBody>
-          <a:bodyPr wrap="square" anchor="ctr" lIns="0" rIns="0" tIns="0" bIns="0">
-            <a:noAutofit/>
-          </a:bodyPr>
-          <a:lstStyle/>
-          <a:p>
-            <a:pPr algn="ctr"/>
-            <a:r>
-              <a:rPr sz="788" b="0">
-                <a:solidFill>
-                  <a:srgbClr val="D62828"/>
-                </a:solidFill>
-                <a:latin typeface="Arial"/>
-              </a:rPr>
-              <a:t>ITO 50 nm   or   Ag 10 nm</a:t>
-            </a:r>
-          </a:p>
-        </p:txBody>
-      </p:sp>
-      <p:sp>
-        <p:nvSpPr>
-          <p:cNvPr id="9" name="Bottom-emitting OLED / HTL (200 nm) front"/>
+          </a:p>
+        </p:txBody>
+      </p:sp>
+      <p:sp>
+        <p:nvSpPr>
+          <p:cNvPr id="13" name="Bottom-emitting OLED / HTL (200 nm) front"/>
           <p:cNvSpPr/>
           <p:nvPr/>
         </p:nvSpPr>
@@ -3530,14 +3798,49 @@
       </p:sp>
       <p:sp>
         <p:nvSpPr>
-          <p:cNvPr id="10" name="Bottom-emitting OLED / HTL (200 nm) side"/>
+          <p:cNvPr id="14" name="Bottom-emitting OLED / HTL (200 nm) label"/>
+          <p:cNvSpPr txBox="1"/>
+          <p:nvPr/>
+        </p:nvSpPr>
+        <p:spPr>
+          <a:xfrm>
+            <a:off x="4336760" y="3182119"/>
+            <a:ext cx="3518175" cy="328305"/>
+          </a:xfrm>
+          <a:prstGeom prst="rect">
+            <a:avLst/>
+          </a:prstGeom>
+          <a:noFill/>
+        </p:spPr>
+        <p:txBody>
+          <a:bodyPr wrap="square" anchor="ctr" lIns="0" rIns="0" tIns="0" bIns="0">
+            <a:noAutofit/>
+          </a:bodyPr>
+          <a:lstStyle/>
+          <a:p>
+            <a:pPr algn="ctr"/>
+            <a:r>
+              <a:rPr sz="994" b="0">
+                <a:solidFill>
+                  <a:srgbClr val="1B2026"/>
+                </a:solidFill>
+                <a:latin typeface="Arial"/>
+              </a:rPr>
+              <a:t>HTL (200 nm)</a:t>
+            </a:r>
+          </a:p>
+        </p:txBody>
+      </p:sp>
+      <p:sp>
+        <p:nvSpPr>
+          <p:cNvPr id="15" name="Bottom-emitting OLED / EML (20 nm) left"/>
           <p:cNvSpPr/>
           <p:nvPr/>
         </p:nvSpPr>
         <p:spPr>
           <a:xfrm>
-            <a:off x="7924602" y="2997937"/>
-            <a:ext cx="278667" cy="522501"/>
+            <a:off x="3992780" y="2719270"/>
+            <a:ext cx="274313" cy="452834"/>
           </a:xfrm>
           <a:custGeom>
             <a:avLst/>
@@ -3546,25 +3849,25 @@
             <a:cxnLst/>
             <a:rect l="l" t="t" r="r" b="b"/>
             <a:pathLst>
-              <a:path w="278667" h="522501">
+              <a:path w="274313" h="452834">
                 <a:moveTo>
-                  <a:pt x="0" y="522501"/>
+                  <a:pt x="274313" y="452834"/>
                 </a:moveTo>
                 <a:lnTo>
-                  <a:pt x="278667" y="348334"/>
-                </a:lnTo>
-                <a:lnTo>
-                  <a:pt x="278667" y="0"/>
-                </a:lnTo>
-                <a:lnTo>
-                  <a:pt x="0" y="174167"/>
+                  <a:pt x="0" y="278667"/>
+                </a:lnTo>
+                <a:lnTo>
+                  <a:pt x="0" y="0"/>
+                </a:lnTo>
+                <a:lnTo>
+                  <a:pt x="274313" y="174167"/>
                 </a:lnTo>
                 <a:close/>
               </a:path>
             </a:pathLst>
           </a:custGeom>
           <a:solidFill>
-            <a:srgbClr val="BB904B"/>
+            <a:srgbClr val="963131"/>
           </a:solidFill>
           <a:ln w="9525">
             <a:solidFill>
@@ -3597,42 +3900,74 @@
       </p:sp>
       <p:sp>
         <p:nvSpPr>
-          <p:cNvPr id="11" name="Bottom-emitting OLED / HTL (200 nm) label"/>
-          <p:cNvSpPr txBox="1"/>
+          <p:cNvPr id="16" name="Bottom-emitting OLED / EML (20 nm) right"/>
+          <p:cNvSpPr/>
           <p:nvPr/>
         </p:nvSpPr>
         <p:spPr>
           <a:xfrm>
-            <a:off x="4336760" y="3182119"/>
-            <a:ext cx="3518175" cy="328305"/>
-          </a:xfrm>
-          <a:prstGeom prst="rect">
+            <a:off x="7924602" y="2719270"/>
+            <a:ext cx="274313" cy="452834"/>
+          </a:xfrm>
+          <a:custGeom>
             <a:avLst/>
-          </a:prstGeom>
-          <a:noFill/>
-        </p:spPr>
-        <p:txBody>
-          <a:bodyPr wrap="square" anchor="ctr" lIns="0" rIns="0" tIns="0" bIns="0">
-            <a:noAutofit/>
-          </a:bodyPr>
+            <a:gdLst/>
+            <a:ahLst/>
+            <a:cxnLst/>
+            <a:rect l="l" t="t" r="r" b="b"/>
+            <a:pathLst>
+              <a:path w="274313" h="452834">
+                <a:moveTo>
+                  <a:pt x="0" y="452834"/>
+                </a:moveTo>
+                <a:lnTo>
+                  <a:pt x="274313" y="278667"/>
+                </a:lnTo>
+                <a:lnTo>
+                  <a:pt x="274313" y="0"/>
+                </a:lnTo>
+                <a:lnTo>
+                  <a:pt x="0" y="174167"/>
+                </a:lnTo>
+                <a:close/>
+              </a:path>
+            </a:pathLst>
+          </a:custGeom>
+          <a:solidFill>
+            <a:srgbClr val="963131"/>
+          </a:solidFill>
+          <a:ln w="9525">
+            <a:solidFill>
+              <a:srgbClr val="5D666F"/>
+            </a:solidFill>
+          </a:ln>
+          <a:effectLst/>
+        </p:spPr>
+        <p:style>
+          <a:lnRef idx="1">
+            <a:schemeClr val="accent1"/>
+          </a:lnRef>
+          <a:fillRef idx="3">
+            <a:schemeClr val="accent1"/>
+          </a:fillRef>
+          <a:effectRef idx="2">
+            <a:schemeClr val="accent1"/>
+          </a:effectRef>
+          <a:fontRef idx="minor">
+            <a:schemeClr val="lt1"/>
+          </a:fontRef>
+        </p:style>
+        <p:txBody>
+          <a:bodyPr rtlCol="0" anchor="ctr"/>
           <a:lstStyle/>
           <a:p>
             <a:pPr algn="ctr"/>
-            <a:r>
-              <a:rPr sz="994" b="0">
-                <a:solidFill>
-                  <a:srgbClr val="1B2026"/>
-                </a:solidFill>
-                <a:latin typeface="Arial"/>
-              </a:rPr>
-              <a:t>HTL (200 nm)</a:t>
-            </a:r>
-          </a:p>
-        </p:txBody>
-      </p:sp>
-      <p:sp>
-        <p:nvSpPr>
-          <p:cNvPr id="12" name="Bottom-emitting OLED / EML (20 nm) front"/>
+          </a:p>
+        </p:txBody>
+      </p:sp>
+      <p:sp>
+        <p:nvSpPr>
+          <p:cNvPr id="17" name="Bottom-emitting OLED / EML (20 nm) front"/>
           <p:cNvSpPr/>
           <p:nvPr/>
         </p:nvSpPr>
@@ -3699,14 +4034,49 @@
       </p:sp>
       <p:sp>
         <p:nvSpPr>
-          <p:cNvPr id="13" name="Bottom-emitting OLED / EML (20 nm) side"/>
+          <p:cNvPr id="18" name="Bottom-emitting OLED / EML (20 nm) label"/>
+          <p:cNvSpPr txBox="1"/>
+          <p:nvPr/>
+        </p:nvSpPr>
+        <p:spPr>
+          <a:xfrm>
+            <a:off x="4336760" y="2868618"/>
+            <a:ext cx="3518175" cy="328305"/>
+          </a:xfrm>
+          <a:prstGeom prst="rect">
+            <a:avLst/>
+          </a:prstGeom>
+          <a:noFill/>
+        </p:spPr>
+        <p:txBody>
+          <a:bodyPr wrap="square" anchor="ctr" lIns="0" rIns="0" tIns="0" bIns="0">
+            <a:noAutofit/>
+          </a:bodyPr>
+          <a:lstStyle/>
+          <a:p>
+            <a:pPr algn="ctr"/>
+            <a:r>
+              <a:rPr sz="994" b="0">
+                <a:solidFill>
+                  <a:srgbClr val="F2F5F8"/>
+                </a:solidFill>
+                <a:latin typeface="Arial"/>
+              </a:rPr>
+              <a:t>EML (20 nm)</a:t>
+            </a:r>
+          </a:p>
+        </p:txBody>
+      </p:sp>
+      <p:sp>
+        <p:nvSpPr>
+          <p:cNvPr id="19" name="Bottom-emitting OLED / ETL (200 nm) left"/>
           <p:cNvSpPr/>
           <p:nvPr/>
         </p:nvSpPr>
         <p:spPr>
           <a:xfrm>
-            <a:off x="7924602" y="2719270"/>
-            <a:ext cx="278667" cy="452834"/>
+            <a:off x="3992780" y="2370936"/>
+            <a:ext cx="274313" cy="522501"/>
           </a:xfrm>
           <a:custGeom>
             <a:avLst/>
@@ -3715,25 +4085,25 @@
             <a:cxnLst/>
             <a:rect l="l" t="t" r="r" b="b"/>
             <a:pathLst>
-              <a:path w="278667" h="452834">
+              <a:path w="274313" h="522501">
                 <a:moveTo>
-                  <a:pt x="0" y="452834"/>
+                  <a:pt x="274313" y="522501"/>
                 </a:moveTo>
                 <a:lnTo>
-                  <a:pt x="278667" y="278667"/>
-                </a:lnTo>
-                <a:lnTo>
-                  <a:pt x="278667" y="0"/>
-                </a:lnTo>
-                <a:lnTo>
-                  <a:pt x="0" y="174167"/>
+                  <a:pt x="0" y="348334"/>
+                </a:lnTo>
+                <a:lnTo>
+                  <a:pt x="0" y="0"/>
+                </a:lnTo>
+                <a:lnTo>
+                  <a:pt x="274313" y="174167"/>
                 </a:lnTo>
                 <a:close/>
               </a:path>
             </a:pathLst>
           </a:custGeom>
           <a:solidFill>
-            <a:srgbClr val="8B2D2D"/>
+            <a:srgbClr val="6B81B7"/>
           </a:solidFill>
           <a:ln w="9525">
             <a:solidFill>
@@ -3766,42 +4136,74 @@
       </p:sp>
       <p:sp>
         <p:nvSpPr>
-          <p:cNvPr id="14" name="Bottom-emitting OLED / EML (20 nm) label"/>
-          <p:cNvSpPr txBox="1"/>
+          <p:cNvPr id="20" name="Bottom-emitting OLED / ETL (200 nm) right"/>
+          <p:cNvSpPr/>
           <p:nvPr/>
         </p:nvSpPr>
         <p:spPr>
           <a:xfrm>
-            <a:off x="4336760" y="2868618"/>
-            <a:ext cx="3518175" cy="328305"/>
-          </a:xfrm>
-          <a:prstGeom prst="rect">
+            <a:off x="7924602" y="2370936"/>
+            <a:ext cx="274313" cy="522501"/>
+          </a:xfrm>
+          <a:custGeom>
             <a:avLst/>
-          </a:prstGeom>
-          <a:noFill/>
-        </p:spPr>
-        <p:txBody>
-          <a:bodyPr wrap="square" anchor="ctr" lIns="0" rIns="0" tIns="0" bIns="0">
-            <a:noAutofit/>
-          </a:bodyPr>
+            <a:gdLst/>
+            <a:ahLst/>
+            <a:cxnLst/>
+            <a:rect l="l" t="t" r="r" b="b"/>
+            <a:pathLst>
+              <a:path w="274313" h="522501">
+                <a:moveTo>
+                  <a:pt x="0" y="522501"/>
+                </a:moveTo>
+                <a:lnTo>
+                  <a:pt x="274313" y="348334"/>
+                </a:lnTo>
+                <a:lnTo>
+                  <a:pt x="274313" y="0"/>
+                </a:lnTo>
+                <a:lnTo>
+                  <a:pt x="0" y="174167"/>
+                </a:lnTo>
+                <a:close/>
+              </a:path>
+            </a:pathLst>
+          </a:custGeom>
+          <a:solidFill>
+            <a:srgbClr val="6B81B7"/>
+          </a:solidFill>
+          <a:ln w="9525">
+            <a:solidFill>
+              <a:srgbClr val="5D666F"/>
+            </a:solidFill>
+          </a:ln>
+          <a:effectLst/>
+        </p:spPr>
+        <p:style>
+          <a:lnRef idx="1">
+            <a:schemeClr val="accent1"/>
+          </a:lnRef>
+          <a:fillRef idx="3">
+            <a:schemeClr val="accent1"/>
+          </a:fillRef>
+          <a:effectRef idx="2">
+            <a:schemeClr val="accent1"/>
+          </a:effectRef>
+          <a:fontRef idx="minor">
+            <a:schemeClr val="lt1"/>
+          </a:fontRef>
+        </p:style>
+        <p:txBody>
+          <a:bodyPr rtlCol="0" anchor="ctr"/>
           <a:lstStyle/>
           <a:p>
             <a:pPr algn="ctr"/>
-            <a:r>
-              <a:rPr sz="994" b="0">
-                <a:solidFill>
-                  <a:srgbClr val="F2F5F8"/>
-                </a:solidFill>
-                <a:latin typeface="Arial"/>
-              </a:rPr>
-              <a:t>EML (20 nm)</a:t>
-            </a:r>
-          </a:p>
-        </p:txBody>
-      </p:sp>
-      <p:sp>
-        <p:nvSpPr>
-          <p:cNvPr id="15" name="Bottom-emitting OLED / ETL (200 nm) front"/>
+          </a:p>
+        </p:txBody>
+      </p:sp>
+      <p:sp>
+        <p:nvSpPr>
+          <p:cNvPr id="21" name="Bottom-emitting OLED / ETL (200 nm) front"/>
           <p:cNvSpPr/>
           <p:nvPr/>
         </p:nvSpPr>
@@ -3868,14 +4270,49 @@
       </p:sp>
       <p:sp>
         <p:nvSpPr>
-          <p:cNvPr id="16" name="Bottom-emitting OLED / ETL (200 nm) side"/>
+          <p:cNvPr id="22" name="Bottom-emitting OLED / ETL (200 nm) label"/>
+          <p:cNvSpPr txBox="1"/>
+          <p:nvPr/>
+        </p:nvSpPr>
+        <p:spPr>
+          <a:xfrm>
+            <a:off x="4336760" y="2555117"/>
+            <a:ext cx="3518175" cy="328305"/>
+          </a:xfrm>
+          <a:prstGeom prst="rect">
+            <a:avLst/>
+          </a:prstGeom>
+          <a:noFill/>
+        </p:spPr>
+        <p:txBody>
+          <a:bodyPr wrap="square" anchor="ctr" lIns="0" rIns="0" tIns="0" bIns="0">
+            <a:noAutofit/>
+          </a:bodyPr>
+          <a:lstStyle/>
+          <a:p>
+            <a:pPr algn="ctr"/>
+            <a:r>
+              <a:rPr sz="994" b="0">
+                <a:solidFill>
+                  <a:srgbClr val="1B2026"/>
+                </a:solidFill>
+                <a:latin typeface="Arial"/>
+              </a:rPr>
+              <a:t>ETL (200 nm)</a:t>
+            </a:r>
+          </a:p>
+        </p:txBody>
+      </p:sp>
+      <p:sp>
+        <p:nvSpPr>
+          <p:cNvPr id="23" name="Bottom-emitting OLED / Ag (100 nm) left"/>
           <p:cNvSpPr/>
           <p:nvPr/>
         </p:nvSpPr>
         <p:spPr>
           <a:xfrm>
-            <a:off x="7924602" y="2370936"/>
-            <a:ext cx="278667" cy="522501"/>
+            <a:off x="3992780" y="2092268"/>
+            <a:ext cx="274313" cy="452835"/>
           </a:xfrm>
           <a:custGeom>
             <a:avLst/>
@@ -3884,25 +4321,25 @@
             <a:cxnLst/>
             <a:rect l="l" t="t" r="r" b="b"/>
             <a:pathLst>
-              <a:path w="278667" h="522501">
+              <a:path w="274313" h="452835">
                 <a:moveTo>
-                  <a:pt x="0" y="522501"/>
+                  <a:pt x="274313" y="452835"/>
                 </a:moveTo>
                 <a:lnTo>
-                  <a:pt x="278667" y="348334"/>
-                </a:lnTo>
-                <a:lnTo>
-                  <a:pt x="278667" y="0"/>
-                </a:lnTo>
-                <a:lnTo>
-                  <a:pt x="0" y="174167"/>
+                  <a:pt x="0" y="278668"/>
+                </a:lnTo>
+                <a:lnTo>
+                  <a:pt x="0" y="0"/>
+                </a:lnTo>
+                <a:lnTo>
+                  <a:pt x="274313" y="174167"/>
                 </a:lnTo>
                 <a:close/>
               </a:path>
             </a:pathLst>
           </a:custGeom>
           <a:solidFill>
-            <a:srgbClr val="6378AA"/>
+            <a:srgbClr val="A9ADB1"/>
           </a:solidFill>
           <a:ln w="9525">
             <a:solidFill>
@@ -3935,42 +4372,141 @@
       </p:sp>
       <p:sp>
         <p:nvSpPr>
-          <p:cNvPr id="17" name="Bottom-emitting OLED / ETL (200 nm) label"/>
-          <p:cNvSpPr txBox="1"/>
+          <p:cNvPr id="24" name="Bottom-emitting OLED / Ag (100 nm) right"/>
+          <p:cNvSpPr/>
           <p:nvPr/>
         </p:nvSpPr>
         <p:spPr>
           <a:xfrm>
-            <a:off x="4336760" y="2555117"/>
-            <a:ext cx="3518175" cy="328305"/>
-          </a:xfrm>
-          <a:prstGeom prst="rect">
+            <a:off x="7924602" y="2092268"/>
+            <a:ext cx="274313" cy="452835"/>
+          </a:xfrm>
+          <a:custGeom>
             <a:avLst/>
-          </a:prstGeom>
-          <a:noFill/>
-        </p:spPr>
-        <p:txBody>
-          <a:bodyPr wrap="square" anchor="ctr" lIns="0" rIns="0" tIns="0" bIns="0">
-            <a:noAutofit/>
-          </a:bodyPr>
+            <a:gdLst/>
+            <a:ahLst/>
+            <a:cxnLst/>
+            <a:rect l="l" t="t" r="r" b="b"/>
+            <a:pathLst>
+              <a:path w="274313" h="452835">
+                <a:moveTo>
+                  <a:pt x="0" y="452835"/>
+                </a:moveTo>
+                <a:lnTo>
+                  <a:pt x="274313" y="278668"/>
+                </a:lnTo>
+                <a:lnTo>
+                  <a:pt x="274313" y="0"/>
+                </a:lnTo>
+                <a:lnTo>
+                  <a:pt x="0" y="174167"/>
+                </a:lnTo>
+                <a:close/>
+              </a:path>
+            </a:pathLst>
+          </a:custGeom>
+          <a:solidFill>
+            <a:srgbClr val="A9ADB1"/>
+          </a:solidFill>
+          <a:ln w="9525">
+            <a:solidFill>
+              <a:srgbClr val="5D666F"/>
+            </a:solidFill>
+          </a:ln>
+          <a:effectLst/>
+        </p:spPr>
+        <p:style>
+          <a:lnRef idx="1">
+            <a:schemeClr val="accent1"/>
+          </a:lnRef>
+          <a:fillRef idx="3">
+            <a:schemeClr val="accent1"/>
+          </a:fillRef>
+          <a:effectRef idx="2">
+            <a:schemeClr val="accent1"/>
+          </a:effectRef>
+          <a:fontRef idx="minor">
+            <a:schemeClr val="lt1"/>
+          </a:fontRef>
+        </p:style>
+        <p:txBody>
+          <a:bodyPr rtlCol="0" anchor="ctr"/>
           <a:lstStyle/>
           <a:p>
             <a:pPr algn="ctr"/>
-            <a:r>
-              <a:rPr sz="994" b="0">
-                <a:solidFill>
-                  <a:srgbClr val="1B2026"/>
-                </a:solidFill>
-                <a:latin typeface="Arial"/>
-              </a:rPr>
-              <a:t>ETL (200 nm)</a:t>
-            </a:r>
-          </a:p>
-        </p:txBody>
-      </p:sp>
-      <p:sp>
-        <p:nvSpPr>
-          <p:cNvPr id="18" name="Bottom-emitting OLED / Ag (100 nm) front"/>
+          </a:p>
+        </p:txBody>
+      </p:sp>
+      <p:sp>
+        <p:nvSpPr>
+          <p:cNvPr id="25" name="Bottom-emitting OLED / Ag (100 nm) top"/>
+          <p:cNvSpPr/>
+          <p:nvPr/>
+        </p:nvSpPr>
+        <p:spPr>
+          <a:xfrm>
+            <a:off x="3992780" y="2092268"/>
+            <a:ext cx="4206135" cy="174167"/>
+          </a:xfrm>
+          <a:custGeom>
+            <a:avLst/>
+            <a:gdLst/>
+            <a:ahLst/>
+            <a:cxnLst/>
+            <a:rect l="l" t="t" r="r" b="b"/>
+            <a:pathLst>
+              <a:path w="4206135" h="174167">
+                <a:moveTo>
+                  <a:pt x="274313" y="174167"/>
+                </a:moveTo>
+                <a:lnTo>
+                  <a:pt x="3931822" y="174167"/>
+                </a:lnTo>
+                <a:lnTo>
+                  <a:pt x="4206135" y="0"/>
+                </a:lnTo>
+                <a:lnTo>
+                  <a:pt x="0" y="0"/>
+                </a:lnTo>
+                <a:close/>
+              </a:path>
+            </a:pathLst>
+          </a:custGeom>
+          <a:solidFill>
+            <a:srgbClr val="DDE3E8"/>
+          </a:solidFill>
+          <a:ln w="9525">
+            <a:solidFill>
+              <a:srgbClr val="5D666F"/>
+            </a:solidFill>
+          </a:ln>
+          <a:effectLst/>
+        </p:spPr>
+        <p:style>
+          <a:lnRef idx="1">
+            <a:schemeClr val="accent1"/>
+          </a:lnRef>
+          <a:fillRef idx="3">
+            <a:schemeClr val="accent1"/>
+          </a:fillRef>
+          <a:effectRef idx="2">
+            <a:schemeClr val="accent1"/>
+          </a:effectRef>
+          <a:fontRef idx="minor">
+            <a:schemeClr val="lt1"/>
+          </a:fontRef>
+        </p:style>
+        <p:txBody>
+          <a:bodyPr rtlCol="0" anchor="ctr"/>
+          <a:lstStyle/>
+          <a:p>
+            <a:pPr algn="ctr"/>
+          </a:p>
+        </p:txBody>
+      </p:sp>
+      <p:sp>
+        <p:nvSpPr>
+          <p:cNvPr id="26" name="Bottom-emitting OLED / Ag (100 nm) front"/>
           <p:cNvSpPr/>
           <p:nvPr/>
         </p:nvSpPr>
@@ -4037,141 +4573,7 @@
       </p:sp>
       <p:sp>
         <p:nvSpPr>
-          <p:cNvPr id="19" name="Bottom-emitting OLED / Ag (100 nm) side"/>
-          <p:cNvSpPr/>
-          <p:nvPr/>
-        </p:nvSpPr>
-        <p:spPr>
-          <a:xfrm>
-            <a:off x="7924602" y="2092268"/>
-            <a:ext cx="278667" cy="452835"/>
-          </a:xfrm>
-          <a:custGeom>
-            <a:avLst/>
-            <a:gdLst/>
-            <a:ahLst/>
-            <a:cxnLst/>
-            <a:rect l="l" t="t" r="r" b="b"/>
-            <a:pathLst>
-              <a:path w="278667" h="452835">
-                <a:moveTo>
-                  <a:pt x="0" y="452835"/>
-                </a:moveTo>
-                <a:lnTo>
-                  <a:pt x="278667" y="278668"/>
-                </a:lnTo>
-                <a:lnTo>
-                  <a:pt x="278667" y="0"/>
-                </a:lnTo>
-                <a:lnTo>
-                  <a:pt x="0" y="174167"/>
-                </a:lnTo>
-                <a:close/>
-              </a:path>
-            </a:pathLst>
-          </a:custGeom>
-          <a:solidFill>
-            <a:srgbClr val="9DA1A5"/>
-          </a:solidFill>
-          <a:ln w="9525">
-            <a:solidFill>
-              <a:srgbClr val="5D666F"/>
-            </a:solidFill>
-          </a:ln>
-          <a:effectLst/>
-        </p:spPr>
-        <p:style>
-          <a:lnRef idx="1">
-            <a:schemeClr val="accent1"/>
-          </a:lnRef>
-          <a:fillRef idx="3">
-            <a:schemeClr val="accent1"/>
-          </a:fillRef>
-          <a:effectRef idx="2">
-            <a:schemeClr val="accent1"/>
-          </a:effectRef>
-          <a:fontRef idx="minor">
-            <a:schemeClr val="lt1"/>
-          </a:fontRef>
-        </p:style>
-        <p:txBody>
-          <a:bodyPr rtlCol="0" anchor="ctr"/>
-          <a:lstStyle/>
-          <a:p>
-            <a:pPr algn="ctr"/>
-          </a:p>
-        </p:txBody>
-      </p:sp>
-      <p:sp>
-        <p:nvSpPr>
-          <p:cNvPr id="20" name="Bottom-emitting OLED / Ag (100 nm) top"/>
-          <p:cNvSpPr/>
-          <p:nvPr/>
-        </p:nvSpPr>
-        <p:spPr>
-          <a:xfrm>
-            <a:off x="4267093" y="2092268"/>
-            <a:ext cx="3936176" cy="174167"/>
-          </a:xfrm>
-          <a:custGeom>
-            <a:avLst/>
-            <a:gdLst/>
-            <a:ahLst/>
-            <a:cxnLst/>
-            <a:rect l="l" t="t" r="r" b="b"/>
-            <a:pathLst>
-              <a:path w="3936176" h="174167">
-                <a:moveTo>
-                  <a:pt x="0" y="174167"/>
-                </a:moveTo>
-                <a:lnTo>
-                  <a:pt x="3657509" y="174167"/>
-                </a:lnTo>
-                <a:lnTo>
-                  <a:pt x="3936176" y="0"/>
-                </a:lnTo>
-                <a:lnTo>
-                  <a:pt x="278668" y="0"/>
-                </a:lnTo>
-                <a:close/>
-              </a:path>
-            </a:pathLst>
-          </a:custGeom>
-          <a:solidFill>
-            <a:srgbClr val="DDE3E8"/>
-          </a:solidFill>
-          <a:ln w="9525">
-            <a:solidFill>
-              <a:srgbClr val="5D666F"/>
-            </a:solidFill>
-          </a:ln>
-          <a:effectLst/>
-        </p:spPr>
-        <p:style>
-          <a:lnRef idx="1">
-            <a:schemeClr val="accent1"/>
-          </a:lnRef>
-          <a:fillRef idx="3">
-            <a:schemeClr val="accent1"/>
-          </a:fillRef>
-          <a:effectRef idx="2">
-            <a:schemeClr val="accent1"/>
-          </a:effectRef>
-          <a:fontRef idx="minor">
-            <a:schemeClr val="lt1"/>
-          </a:fontRef>
-        </p:style>
-        <p:txBody>
-          <a:bodyPr rtlCol="0" anchor="ctr"/>
-          <a:lstStyle/>
-          <a:p>
-            <a:pPr algn="ctr"/>
-          </a:p>
-        </p:txBody>
-      </p:sp>
-      <p:sp>
-        <p:nvSpPr>
-          <p:cNvPr id="21" name="Bottom-emitting OLED / Ag (100 nm) label"/>
+          <p:cNvPr id="27" name="Bottom-emitting OLED / Ag (100 nm) label"/>
           <p:cNvSpPr txBox="1"/>
           <p:nvPr/>
         </p:nvSpPr>
@@ -4206,13 +4608,13 @@
       </p:sp>
       <p:sp>
         <p:nvSpPr>
-          <p:cNvPr id="22" name="Bottom-emitting OLED title"/>
+          <p:cNvPr id="28" name="Bottom-emitting OLED title"/>
           <p:cNvSpPr txBox="1"/>
           <p:nvPr/>
         </p:nvSpPr>
         <p:spPr>
           <a:xfrm>
-            <a:off x="3971009" y="1337254"/>
+            <a:off x="3831676" y="1337254"/>
             <a:ext cx="4528344" cy="430193"/>
           </a:xfrm>
           <a:prstGeom prst="rect">
@@ -4241,7 +4643,7 @@
       </p:sp>
       <p:cxnSp>
         <p:nvCxnSpPr>
-          <p:cNvPr id="23" name="bottom emission"/>
+          <p:cNvPr id="29" name="bottom emission"/>
           <p:cNvCxnSpPr/>
           <p:nvPr/>
         </p:nvCxnSpPr>
@@ -4278,7 +4680,7 @@
       </p:cxnSp>
       <p:cxnSp>
         <p:nvCxnSpPr>
-          <p:cNvPr id="24" name="bottom emission"/>
+          <p:cNvPr id="30" name="bottom emission"/>
           <p:cNvCxnSpPr/>
           <p:nvPr/>
         </p:nvCxnSpPr>
@@ -4315,7 +4717,7 @@
       </p:cxnSp>
       <p:cxnSp>
         <p:nvCxnSpPr>
-          <p:cNvPr id="25" name="bottom emission"/>
+          <p:cNvPr id="31" name="bottom emission"/>
           <p:cNvCxnSpPr/>
           <p:nvPr/>
         </p:nvCxnSpPr>
@@ -4352,7 +4754,7 @@
       </p:cxnSp>
       <p:sp>
         <p:nvSpPr>
-          <p:cNvPr id="26" name="emission label"/>
+          <p:cNvPr id="32" name="emission label"/>
           <p:cNvSpPr txBox="1"/>
           <p:nvPr/>
         </p:nvSpPr>
